--- a/slides/present.pptx
+++ b/slides/present.pptx
@@ -1425,7 +1425,7 @@
           <a:p/>
           <a:p>
             <a:r>
-              <a:t>LAND: "That is the customer's agent, not ours. We built the tools; they run the loop. She never asked for escalations. The answer would have been 2,400 a week."</a:t>
+              <a:t>LAND: "That is the customer's agent, not ours. We built the tools; they run the loop. Her agent may well report 2,400 flags a week, and it reads as the agent working. Nothing we handed her says they wait 31 hours."</a:t>
             </a:r>
           </a:p>
         </p:txBody>

--- a/slides/present.pptx
+++ b/slides/present.pptx
@@ -1337,7 +1337,7 @@
           <a:p/>
           <a:p>
             <a:r>
-              <a:t>MINUTES 3 TO 15: They read. Screen switches the projector to the dashboard; it is Exhibit B, live. Pocket memo at minute 12 to any team that has not found the problem.</a:t>
+              <a:t>MINUTES 3 TO 15: They read the exhibits, printed from docs/exhibits.pdf. Screen switches the projector to the dashboard; it is Exhibit B, live. Pocket memo (Exhibit D, the last page, printed separately) at minute 12 to any team that has not found the problem.</a:t>
             </a:r>
           </a:p>
           <a:p/>
